--- a/yuzq/docs/poc/合同录入与评审演示3.pptx
+++ b/yuzq/docs/poc/合同录入与评审演示3.pptx
@@ -281,9 +281,14 @@
           <a:p>
             <a:r>
               <a:rPr lang="zh-CN" altLang="en-US" dirty="0"/>
-              <a:t>两项目标：合同环节做辅助提效与风险提示，知识库把依据做成当前有效、可引用的业务规则。不替代人工终审。不展开定价与竞品。</a:t>
-            </a:r>
-            <a:endParaRPr lang="zh-CN" altLang="en-US" dirty="0"/>
+              <a:t>合同环节提供录入与评审的辅助，并给出风险提示。终审、签署与盖章由授权人完成。</a:t>
+            </a:r>
+          </a:p>
+          <a:p>
+            <a:r>
+              <a:rPr lang="zh-CN" altLang="en-US" dirty="0"/>
+              <a:t>知识库向合同任务提供已发布、当前有效、可引用的业务规则。合同评审与后续销售问答使用同一套已发布条目。知识库不另设审批流程。</a:t>
+            </a:r>
           </a:p>
         </p:txBody>
       </p:sp>
@@ -329,9 +334,32 @@
           <a:p>
             <a:r>
               <a:rPr lang="zh-CN" altLang="en-US" dirty="0"/>
-              <a:t>企业级来自《Agent Forge 企业产品介绍》：审批、审计可验真、熔断、隔离，另加稳定可靠。稳定可靠在合同侧是指每个环节有可复核的交付物，中断后记录仍在，不依赖单次对话生成结论。角色分为管理员、运维、审批人、只读。被问及定价、部署形态、竞品或第三方效益时，说明见企业产品介绍，本页不承诺金额、可用性百分比，也不引用其他企业的效率数字。部署可按数据边界选择单机、内网或全离线。</a:t>
-            </a:r>
-            <a:endParaRPr lang="zh-CN" altLang="en-US" dirty="0"/>
+              <a:t>岗位在 Agent Forge 中执行，依据来自知识库中已发布的条目。</a:t>
+            </a:r>
+          </a:p>
+          <a:p>
+            <a:r>
+              <a:rPr lang="zh-CN" altLang="en-US" dirty="0"/>
+              <a:t>预填单须销售确认，评审卡须评审人确认。两项确认完成前，系统不放行合同。</a:t>
+            </a:r>
+          </a:p>
+          <a:p>
+            <a:r>
+              <a:rPr lang="zh-CN" altLang="en-US" dirty="0"/>
+              <a:t>字段取值、依据条目与确认人可回溯。记录可校验完整性。异常时停用对应角色，既有审批流程继续执行，停用后核查原因。</a:t>
+            </a:r>
+          </a:p>
+          <a:p>
+            <a:r>
+              <a:rPr lang="zh-CN" altLang="en-US" dirty="0"/>
+              <a:t>查阅、办理与审批按角色区分。角色分为管理员、运维、审批人、只读。合同与报价留存客户环境。</a:t>
+            </a:r>
+          </a:p>
+          <a:p>
+            <a:r>
+              <a:rPr lang="zh-CN" altLang="en-US" dirty="0"/>
+              <a:t>稳定可靠指每个环节留有可复核的交付物。处理中断后，记录仍在。结论不由单次对话直接生成。本页不列示价格、可用性百分比，也不引用其他企业的效率数字。部署按数据边界选择单机、内网或全离线。</a:t>
+            </a:r>
           </a:p>
         </p:txBody>
       </p:sp>
@@ -377,9 +405,32 @@
           <a:p>
             <a:r>
               <a:rPr lang="zh-CN" altLang="en-US" dirty="0"/>
-              <a:t>四个环节在同一底座：构建把岗位配成可交付的角色，运行在单据进入后启动，治理把人工确认设为写回前置，观测可以回看一次处理的输入、依据与确认。不以整份合同的单次阅读代替分段校验与人工签署。</a:t>
-            </a:r>
-            <a:endParaRPr lang="zh-CN" altLang="en-US" dirty="0"/>
+              <a:t>构建、运行、治理、观测处于同一底座。</a:t>
+            </a:r>
+          </a:p>
+          <a:p>
+            <a:r>
+              <a:rPr lang="zh-CN" altLang="en-US" dirty="0"/>
+              <a:t>构建按岗位配置角色。每个角色有交付物，分段核验，不一次给出整份合同的结论。</a:t>
+            </a:r>
+          </a:p>
+          <a:p>
+            <a:r>
+              <a:rPr lang="zh-CN" altLang="en-US" dirty="0"/>
+              <a:t>单据进入后按同一路径运行。销售或评审人确认之后，才写回对应结果。</a:t>
+            </a:r>
+          </a:p>
+          <a:p>
+            <a:r>
+              <a:rPr lang="zh-CN" altLang="en-US" dirty="0"/>
+              <a:t>治理把人工确认设为写回的前置条件。确认留痕。系统不代替签署。</a:t>
+            </a:r>
+          </a:p>
+          <a:p>
+            <a:r>
+              <a:rPr lang="zh-CN" altLang="en-US" dirty="0"/>
+              <a:t>观测可以回看一次处理的输入、依据与确认结果，供再次复核。整份合同不以单次阅读代替分段校验与人工签署。</a:t>
+            </a:r>
           </a:p>
         </p:txBody>
       </p:sp>
@@ -423,7 +474,22 @@
           <a:bodyPr/>
           <a:lstStyle/>
           <a:p>
-            <a:endParaRPr lang="zh-CN" altLang="en-US" dirty="0"/>
+            <a:r>
+              <a:rPr lang="zh-CN" altLang="en-US" dirty="0"/>
+              <a:t>管理平台的协作中配置合同录入与合同评审。角色按岗位界定能力范围。</a:t>
+            </a:r>
+          </a:p>
+          <a:p>
+            <a:r>
+              <a:rPr lang="zh-CN" altLang="en-US" dirty="0"/>
+              <a:t>合同录入接收报价单或扫描件，抽取客户、项目、金额、付款、账期、收货、质保等字段，并标注出处。物料未匹配时提供候选清单，不自动赋码。草稿经销售逐项确认后，才进入后续环节。</a:t>
+            </a:r>
+          </a:p>
+          <a:p>
+            <a:r>
+              <a:rPr lang="zh-CN" altLang="en-US" dirty="0"/>
+              <a:t>合同评审在基础核对之后，由技术、商务、法务同时标注。三份到齐后汇编为一张评审卡，各自确认本段。没有依据条目的行不写入卡片。卡片不定责，不给出是否可签的结论。执行或变更只作提醒，不写入单据。</a:t>
+            </a:r>
           </a:p>
         </p:txBody>
       </p:sp>
@@ -469,9 +535,14 @@
           <a:p>
             <a:r>
               <a:rPr lang="zh-CN" altLang="en-US" dirty="0"/>
-              <a:t>知识库现状与痛点依据需求整理中的知识库章节。建设路径依据 agent-forge-knowledge 的方法论：检索对象是一条当前有效的业务规则，原件、规则与索引分开，草稿不可检索，修订采用发布新条与退役旧条。不把内部层级编号印在页面上。</a:t>
-            </a:r>
-            <a:endParaRPr lang="zh-CN" altLang="en-US" dirty="0"/>
+              <a:t>知识库是合同任务的外接数据源，只提供已发布的当前有效规则与条文。它不另设一套审批流程。</a:t>
+            </a:r>
+          </a:p>
+          <a:p>
+            <a:r>
+              <a:rPr lang="zh-CN" altLang="en-US" dirty="0"/>
+              <a:t>检索对象是一条当前有效的业务规则，不是整篇原件。原件、规则与索引分开存放。草稿不进入检索。修订时发布新条并退役旧条，旧条留档。</a:t>
+            </a:r>
           </a:p>
         </p:txBody>
       </p:sp>
@@ -517,9 +588,26 @@
           <a:p>
             <a:r>
               <a:rPr lang="zh-CN" altLang="en-US" dirty="0"/>
-              <a:t>销售易知识库偏文件目录，OA 另有一套。企业微信问答将文档直接导入，回答质量不足。人资、行政知识库调用率低。优秀经验尚未成为组织知识资产。密级分为全员、区域、机密，放在下一页的共享机制里讲。</a:t>
-            </a:r>
-            <a:endParaRPr lang="zh-CN" altLang="en-US" dirty="0"/>
+              <a:t>销售易以文件目录存放资料，OA 另有一套知识库，两处并存，尚未形成统一的可引用条目。</a:t>
+            </a:r>
+          </a:p>
+          <a:p>
+            <a:r>
+              <a:rPr lang="zh-CN" altLang="en-US" dirty="0"/>
+              <a:t>检索主要按标题进行。按内容和按问题的检索不足。企业微信问答将文档直接导入，未经萃取为当前有效规则，回答质量不足。</a:t>
+            </a:r>
+          </a:p>
+          <a:p>
+            <a:r>
+              <a:rPr lang="zh-CN" altLang="en-US" dirty="0"/>
+              <a:t>人资与行政知识库已经建立，实际调用率低。销售方法与方案仍留在个人，尚未成为组织知识资产。</a:t>
+            </a:r>
+          </a:p>
+          <a:p>
+            <a:r>
+              <a:rPr lang="zh-CN" altLang="en-US" dirty="0"/>
+              <a:t>密级分为全员、区域、机密。权威版本由业务责任人裁定。</a:t>
+            </a:r>
           </a:p>
         </p:txBody>
       </p:sp>
@@ -565,9 +653,26 @@
           <a:p>
             <a:r>
               <a:rPr lang="zh-CN" altLang="en-US" dirty="0"/>
-              <a:t>权威版本由业务责任人裁定，不由系统自行确定。平台按团队、知识库、文件夹划分权限，页面用全员、区域、机密表达密级，不展开平台菜单名称。</a:t>
-            </a:r>
-            <a:endParaRPr lang="zh-CN" altLang="en-US" dirty="0"/>
+              <a:t>存量规模大且质量参差。标题不能反映内容，资料存在而调用率低。</a:t>
+            </a:r>
+          </a:p>
+          <a:p>
+            <a:r>
+              <a:rPr lang="zh-CN" altLang="en-US" dirty="0"/>
+              <a:t>优秀销售方法与方案留在个人经验，尚未沉淀为带适用场景、正文和出处的组织资产。</a:t>
+            </a:r>
+          </a:p>
+          <a:p>
+            <a:r>
+              <a:rPr lang="zh-CN" altLang="en-US" dirty="0"/>
+              <a:t>现有检索以标题为主，不能按内容或按问题查询。</a:t>
+            </a:r>
+          </a:p>
+          <a:p>
+            <a:r>
+              <a:rPr lang="zh-CN" altLang="en-US" dirty="0"/>
+              <a:t>共享与审核不足。权威版本由业务责任人裁定，不由系统自行确定。权限按团队、知识库和文件夹划分。业务密级分为全员、区域、机密。</a:t>
+            </a:r>
           </a:p>
         </p:txBody>
       </p:sp>
@@ -613,9 +718,26 @@
           <a:p>
             <a:r>
               <a:rPr lang="zh-CN" altLang="en-US" dirty="0"/>
-              <a:t>五步是方法论，不是把整篇文档上传后再分类。首期验证销售高频问题，以及合同评审所需的技术、商务、法务依据，确认引用的是当前有效条目。客户判断「几百条覆盖约 80% 常见问题」，该比例不作为承诺。企业微信入口、分诊、贡献激励不纳入这五步。知识运营与审核责任人需要客户指定。</a:t>
-            </a:r>
-            <a:endParaRPr lang="zh-CN" altLang="en-US" dirty="0"/>
+              <a:t>建设对象是一条当前有效的业务规则，不是上传整篇文档后即供问答。</a:t>
+            </a:r>
+          </a:p>
+          <a:p>
+            <a:r>
+              <a:rPr lang="zh-CN" altLang="en-US" dirty="0"/>
+              <a:t>原件归档保存，包括制度文件、产品资料和评审意见，不直接作为问答依据。规则萃取写明适用场景、规则正文和出处。系统只生成草稿，责任人补全后才可发布。草稿不进入检索。</a:t>
+            </a:r>
+          </a:p>
+          <a:p>
+            <a:r>
+              <a:rPr lang="zh-CN" altLang="en-US" dirty="0"/>
+              <a:t>发布后方可检索。修订时发布新条，旧条留档。未满足匹配条件时，返回未覆盖，不以原文起始段或相邻条文作为依据。</a:t>
+            </a:r>
+          </a:p>
+          <a:p>
+            <a:r>
+              <a:rPr lang="zh-CN" altLang="en-US" dirty="0"/>
+              <a:t>首期验证销售高频问题，以及合同评审所需的技术、商务、法务依据，确认引用的是当前有效条目。客户侧关于「数百条覆盖大部分常见问题」的判断，不作为交付指标。企业微信入口、分诊和贡献激励不纳入这五步。知识运营与审核的责任人由客户指定。</a:t>
+            </a:r>
           </a:p>
         </p:txBody>
       </p:sp>
@@ -661,9 +783,26 @@
           <a:p>
             <a:r>
               <a:rPr lang="zh-CN" altLang="en-US" dirty="0"/>
-              <a:t>稳定可靠在知识库侧是：原件与已发布条目保持不变，检索索引可重建；更换模型只重算索引，不改写已发布正文；服务重启不丢失原件与已发布条目。数据留存客户环境，材料不进入服务方电脑。</a:t>
-            </a:r>
-            <a:endParaRPr lang="zh-CN" altLang="en-US" dirty="0"/>
+              <a:t>语义检索与关键词检索并行执行。重排序后返回规则正文、适用场景及出处。草稿与已退役条目不参与召回。</a:t>
+            </a:r>
+          </a:p>
+          <a:p>
+            <a:r>
+              <a:rPr lang="zh-CN" altLang="en-US" dirty="0"/>
+              <a:t>未匹配到已发布规则，或重排序得分未达可用阈值时，结果为未覆盖。不以原文起始段、相邻条文或模型生成内容作为依据。</a:t>
+            </a:r>
+          </a:p>
+          <a:p>
+            <a:r>
+              <a:rPr lang="zh-CN" altLang="en-US" dirty="0"/>
+              <a:t>规则正文、原件与索引分库存放。模型更换或索引重建只重算索引，不改写已发布正文。修订则发布新版本并退役旧版本，旧版本留档。</a:t>
+            </a:r>
+          </a:p>
+          <a:p>
+            <a:r>
+              <a:rPr lang="zh-CN" altLang="en-US" dirty="0"/>
+              <a:t>管理台按集合管理原件入库、草稿、发布与退役，并提供检索预览，用于发布前核验召回结果。未经发布的草稿不纳入检索。原件与已发布条目在服务重启后仍保留。数据留存客户环境。</a:t>
+            </a:r>
           </a:p>
         </p:txBody>
       </p:sp>
@@ -707,7 +846,16 @@
           <a:bodyPr/>
           <a:lstStyle/>
           <a:p>
-            <a:endParaRPr lang="zh-CN" altLang="en-US" dirty="0"/>
+            <a:r>
+              <a:rPr lang="zh-CN" altLang="en-US" dirty="0"/>
+              <a:t>知识库管理平台用于规则卡片的发布与检索预览。原件上传后提取为草稿，经核对保存。草稿未经发布不进入检索。</a:t>
+            </a:r>
+          </a:p>
+          <a:p>
+            <a:r>
+              <a:rPr lang="zh-CN" altLang="en-US" dirty="0"/>
+              <a:t>已发布卡片包含版本、密级、正文、适用要点和出处。制度文件与可结构化的经验按同一路径入库。检索预览用于核验将召回哪一条。发布由业务负责人签核。内容可按行业与集合配置。</a:t>
+            </a:r>
           </a:p>
         </p:txBody>
       </p:sp>
@@ -753,9 +901,20 @@
           <a:p>
             <a:r>
               <a:rPr lang="zh-CN" altLang="en-US" dirty="0"/>
-              <a:t>两条线同步推进。本期优先交付合同创建录入与评审辅助，并同步发布合同评审所需依据。签署、盖章、建单、定责与知识发布仍由人工完成。客户资信前移、销售教练、商机复盘、拜访记录结构化列为后续，不纳入本期。灰度方式是人工与系统双线并行，达标后再扩大范围。</a:t>
-            </a:r>
-            <a:endParaRPr lang="zh-CN" altLang="en-US" dirty="0"/>
+              <a:t>本期交付合同创建录入与评审辅助，评审卡按基础核对、技术、商务、法务汇编，并同步发布合同评审所需的依据条目。高频依据先行发布。</a:t>
+            </a:r>
+          </a:p>
+          <a:p>
+            <a:r>
+              <a:rPr lang="zh-CN" altLang="en-US" dirty="0"/>
+              <a:t>签署、盖章、建单与定责由授权人完成。授权是否超限由人判断。系统不判断方案是否合格。知识发布须负责人签核。</a:t>
+            </a:r>
+          </a:p>
+          <a:p>
+            <a:r>
+              <a:rPr lang="zh-CN" altLang="en-US" dirty="0"/>
+              <a:t>客户资信前移、销售教练、商机复盘、拜访记录结构化不纳入本期，另行立项。扩大范围前，人工处理与系统结果并行对照，达到验收条件后再扩大。</a:t>
+            </a:r>
           </a:p>
         </p:txBody>
       </p:sp>
@@ -801,9 +960,156 @@
           <a:p>
             <a:r>
               <a:rPr lang="zh-CN" altLang="en-US" dirty="0"/>
-              <a:t>上半场讲合同，下半场讲知识库。企业级能力在两条线里各出现一次：一次对应合同写回，一次对应知识发布与检索。</a:t>
-            </a:r>
-            <a:endParaRPr lang="zh-CN" altLang="en-US" dirty="0"/>
+              <a:t>材料分四部分。</a:t>
+            </a:r>
+          </a:p>
+          <a:p>
+            <a:r>
+              <a:rPr lang="zh-CN" altLang="en-US" dirty="0"/>
+              <a:t>第 4 至 5 页为合同现状：业务流程、痛点与优化方向。现状中的耗时是记录，不是本期目标。</a:t>
+            </a:r>
+          </a:p>
+          <a:p>
+            <a:r>
+              <a:rPr lang="zh-CN" altLang="en-US" dirty="0"/>
+              <a:t>第 6 至 9 页为合同落地：预填单、评审卡、依据条目与人工确认。预填单经销售确认后才进入后续环节。评审卡经评审人确认后，系统不自行放行。</a:t>
+            </a:r>
+          </a:p>
+          <a:p>
+            <a:r>
+              <a:rPr lang="zh-CN" altLang="en-US" dirty="0"/>
+              <a:t>第 10 至 13 页为 Agent Forge：企业治理、运行底座、技术架构与管理页面。岗位在该底座上执行，依据来自已发布规则。</a:t>
+            </a:r>
+          </a:p>
+          <a:p>
+            <a:r>
+              <a:rPr lang="zh-CN" altLang="en-US" dirty="0"/>
+              <a:t>第 15 至 20 页为知识库。它是合同任务的外接数据源，只提供已发布的当前有效规则与条文。</a:t>
+            </a:r>
+          </a:p>
+        </p:txBody>
+      </p:sp>
+    </p:spTree>
+  </p:cSld>
+  <p:clrMapOvr>
+    <a:masterClrMapping/>
+  </p:clrMapOvr>
+</p:notes>
+</file>
+
+<file path=ppt/notesSlides/notesSlide22.xml><?xml version="1.0" encoding="utf-8"?>
+<p:notes xmlns:a="http://schemas.openxmlformats.org/drawingml/2006/main" xmlns:r="http://schemas.openxmlformats.org/officeDocument/2006/relationships" xmlns:p="http://schemas.openxmlformats.org/presentationml/2006/main">
+  <p:cSld>
+    <p:spTree>
+      <p:nvGrpSpPr>
+        <p:cNvPr id="1" name=""/>
+        <p:cNvGrpSpPr/>
+        <p:nvPr/>
+      </p:nvGrpSpPr>
+      <p:grpSpPr>
+        <a:xfrm>
+          <a:off x="0" y="0"/>
+          <a:ext cx="0" cy="0"/>
+          <a:chOff x="0" y="0"/>
+          <a:chExt cx="0" cy="0"/>
+        </a:xfrm>
+      </p:grpSpPr>
+      <p:sp>
+        <p:nvSpPr>
+          <p:cNvPr id="2" name="备注"/>
+          <p:cNvSpPr>
+            <a:spLocks noGrp="1"/>
+          </p:cNvSpPr>
+          <p:nvPr>
+            <p:ph type="body" idx="1"/>
+          </p:nvPr>
+        </p:nvSpPr>
+        <p:spPr/>
+        <p:txBody>
+          <a:bodyPr/>
+          <a:lstStyle/>
+          <a:p>
+            <a:r>
+              <a:rPr lang="zh-CN" altLang="en-US" dirty="0"/>
+              <a:t>本页为 Agent Forge Runtime 的技术架构。统一接入包含身份校验、身份绑定，以及租户、负责人、模型三类上下文。</a:t>
+            </a:r>
+          </a:p>
+          <a:p>
+            <a:r>
+              <a:rPr lang="zh-CN" altLang="en-US" dirty="0"/>
+              <a:t>控制台提供角色权限、能力接入、触发器、审批、审计、观测面板和组织管理。</a:t>
+            </a:r>
+          </a:p>
+          <a:p>
+            <a:r>
+              <a:rPr lang="zh-CN" altLang="en-US" dirty="0"/>
+              <a:t>运行核心包括模型网关、执行引擎、状态管理、记忆、工具与文件沙箱、可观测性和治理。状态可存于 PostgreSQL 或 SQLite，按租户隔离。记忆分为会话记忆、个性记忆和组织记忆。文件放在 MinIO 或 S3。高风险动作在人工确认之后执行。</a:t>
+            </a:r>
+          </a:p>
+          <a:p>
+            <a:r>
+              <a:rPr lang="zh-CN" altLang="en-US" dirty="0"/>
+              <a:t>治理包括本人确认、手动熔断、他人审批和多租户。观测保留审计流水，并支持审计验真。审批台承接工单、策略和决策。触发来自定时、事件或人工。</a:t>
+            </a:r>
+          </a:p>
+        </p:txBody>
+      </p:sp>
+    </p:spTree>
+  </p:cSld>
+  <p:clrMapOvr>
+    <a:masterClrMapping/>
+  </p:clrMapOvr>
+</p:notes>
+</file>
+
+<file path=ppt/notesSlides/notesSlide23.xml><?xml version="1.0" encoding="utf-8"?>
+<p:notes xmlns:a="http://schemas.openxmlformats.org/drawingml/2006/main" xmlns:r="http://schemas.openxmlformats.org/officeDocument/2006/relationships" xmlns:p="http://schemas.openxmlformats.org/presentationml/2006/main">
+  <p:cSld>
+    <p:spTree>
+      <p:nvGrpSpPr>
+        <p:cNvPr id="1" name=""/>
+        <p:cNvGrpSpPr/>
+        <p:nvPr/>
+      </p:nvGrpSpPr>
+      <p:grpSpPr>
+        <a:xfrm>
+          <a:off x="0" y="0"/>
+          <a:ext cx="0" cy="0"/>
+          <a:chOff x="0" y="0"/>
+          <a:chExt cx="0" cy="0"/>
+        </a:xfrm>
+      </p:grpSpPr>
+      <p:sp>
+        <p:nvSpPr>
+          <p:cNvPr id="2" name="备注"/>
+          <p:cNvSpPr>
+            <a:spLocks noGrp="1"/>
+          </p:cNvSpPr>
+          <p:nvPr>
+            <p:ph type="body" idx="1"/>
+          </p:nvPr>
+        </p:nvSpPr>
+        <p:spPr/>
+        <p:txBody>
+          <a:bodyPr/>
+          <a:lstStyle/>
+          <a:p>
+            <a:r>
+              <a:rPr lang="zh-CN" altLang="en-US" dirty="0"/>
+              <a:t>知识服务把原件、规则与索引分开。原件存放在对象存储 MinIO，入库后不因检索而改写。规则卡片存放在 Postgres，状态分为草稿、已发布、退役。索引使用向量 Milvus 与关键词 BM25。重建索引不改写正文。</a:t>
+            </a:r>
+          </a:p>
+          <a:p>
+            <a:r>
+              <a:rPr lang="zh-CN" altLang="en-US" dirty="0"/>
+              <a:t>写入包括上传原件、系统起草和责任人发布。检索同时走语义与关键词，重排序后返回已发布规则。系统只生成草稿，草稿不进入检索。发布后才可被 Agent Forge Runtime 引用。修订发布新条，旧条留档。</a:t>
+            </a:r>
+          </a:p>
+          <a:p>
+            <a:r>
+              <a:rPr lang="zh-CN" altLang="en-US" dirty="0"/>
+              <a:t>管理台负责集合、原件、发布、退役和检索预览。按租户隔离。未覆盖时不编造依据。已发布正文不因模型更换而改变。</a:t>
+            </a:r>
           </a:p>
         </p:txBody>
       </p:sp>
@@ -849,9 +1155,20 @@
           <a:p>
             <a:r>
               <a:rPr lang="zh-CN" altLang="en-US" dirty="0"/>
-              <a:t>合同部分依据《雨中情AI合同需求》。定位是辅助提效与风险提示。客户原文中的「5 层递进式审查」是举例，评审卡按基础核对、技术、商务、法务汇编，不写成固定五层。</a:t>
-            </a:r>
-            <a:endParaRPr lang="zh-CN" altLang="en-US" dirty="0"/>
+              <a:t>合同部分依据已确认的业务流程。顺序为创建登记、初审，以及技术、商务、法务标注，其后为盖章与归档。</a:t>
+            </a:r>
+          </a:p>
+          <a:p>
+            <a:r>
+              <a:rPr lang="zh-CN" altLang="en-US" dirty="0"/>
+              <a:t>审查可以分层。本期评审卡按基础核对、技术、商务、法务汇编。技术、商务、法务在基础核对之后同时标注，层数不固定为五层。</a:t>
+            </a:r>
+          </a:p>
+          <a:p>
+            <a:r>
+              <a:rPr lang="zh-CN" altLang="en-US" dirty="0"/>
+              <a:t>本期定位是辅助提效与风险提示。方案是否合格、是否可签，由授权人判断。</a:t>
+            </a:r>
           </a:p>
         </p:txBody>
       </p:sp>
@@ -897,9 +1214,26 @@
           <a:p>
             <a:r>
               <a:rPr lang="zh-CN" altLang="en-US" dirty="0"/>
-              <a:t>流程以客户确认稿为准：创建登记、初审、技术评审、商务评审、法务评审，其后客户盖章与归档。报价是合同的充分非必要条件：权限内可直接创建合同，特价超授权走报价审批。另有提前发货、合同变更、补充协议、退换货，本页不展开。合同模块在销售易上做了结构化表单。</a:t>
-            </a:r>
-            <a:endParaRPr lang="zh-CN" altLang="en-US" dirty="0"/>
+              <a:t>现行流程为创建登记、初审、技术评审、商务评审、法务评审，其后为客户盖章与归档。合同模块在销售易上使用结构化表单。表单中的每一项称为字段，例如客户、项目、金额、付款比例、交期、收货与质保。</a:t>
+            </a:r>
+          </a:p>
+          <a:p>
+            <a:r>
+              <a:rPr lang="zh-CN" altLang="en-US" dirty="0"/>
+              <a:t>创建登记的现况是单份 30 分钟以上。该时长是现状记录，不是本期目标。报价单不是创建合同的必要条件：授权范围内可以直接创建合同；特价超出授权时，先完成报价审批。</a:t>
+            </a:r>
+          </a:p>
+          <a:p>
+            <a:r>
+              <a:rPr lang="zh-CN" altLang="en-US" dirty="0"/>
+              <a:t>初审由区域专员核对产品、价格与交期。技术评审对照产品参数、施工方案与技术标准作标注。商务评审按权限分层：授权范围内由区域商务审核，大系统平台以上由集团商务审核，关注付款条件、违约赔偿与宽限期。法务评审识别风险并提示修改方向，终审由法务完成。</a:t>
+            </a:r>
+          </a:p>
+          <a:p>
+            <a:r>
+              <a:rPr lang="zh-CN" altLang="en-US" dirty="0"/>
+              <a:t>提前发货、合同变更、补充协议、退换货属于现有业务。本期对发货排产、补充协议和退换货只作提醒，不写入单据，不替代签署、盖章、建单与定责。</a:t>
+            </a:r>
           </a:p>
         </p:txBody>
       </p:sp>
@@ -945,9 +1279,44 @@
           <a:p>
             <a:r>
               <a:rPr lang="zh-CN" altLang="en-US" dirty="0"/>
-              <a:t>30 分钟以上、审核数天至一周，是客户交流中的现状，不是本期承诺。客户曾预期初审量由每天 50 单提升到 200 单，该数字不作为方案目标，被问及时说明待现场核对。客户资信评审目前集中在签署前，本期不纳入授信决策。部分风险点需销售补充管控方案，例如账期与历史合作方式，本页不展开个案。</a:t>
-            </a:r>
-            <a:endParaRPr lang="zh-CN" altLang="en-US" dirty="0"/>
+              <a:t>五项为现状及对应方向。耗时与单量是现状或待核对的基线，不作为本期交付指标。</a:t>
+            </a:r>
+          </a:p>
+          <a:p>
+            <a:r>
+              <a:rPr lang="zh-CN" altLang="en-US" dirty="0"/>
+              <a:t>合同创建：销售易填单现况为单份 30 分钟以上。方向是从报价单或扫描件提取字段，生成预填单，并标注每一项的出处。</a:t>
+            </a:r>
+          </a:p>
+          <a:p>
+            <a:r>
+              <a:rPr lang="zh-CN" altLang="en-US" dirty="0"/>
+              <a:t>结算条款：付款比例须达到 100%。方向是按结构化字段填写，并自动校验比例是否齐备。</a:t>
+            </a:r>
+          </a:p>
+          <a:p>
+            <a:r>
+              <a:rPr lang="zh-CN" altLang="en-US" dirty="0"/>
+              <a:t>收货信息：须与签收单一致。方向是自动比对并提示差异，差异由人确认。</a:t>
+            </a:r>
+          </a:p>
+          <a:p>
+            <a:r>
+              <a:rPr lang="zh-CN" altLang="en-US" dirty="0"/>
+              <a:t>产品清单：报价与合同为多对多，物料名称不统一。方向是统一名称与编码规则。规则由双方厘定。未形成对照的物料只提供候选清单，不自动赋码。</a:t>
+            </a:r>
+          </a:p>
+          <a:p>
+            <a:r>
+              <a:rPr lang="zh-CN" altLang="en-US" dirty="0"/>
+              <a:t>合同审核：现况为数天至一周。方向是识别风险后由评审人确认，系统不自行放行。</a:t>
+            </a:r>
+          </a:p>
+          <a:p>
+            <a:r>
+              <a:rPr lang="zh-CN" altLang="en-US" dirty="0"/>
+              <a:t>交流中提到的初审处理量，须经现场核对后才能作为基线，本期不列为交付指标。客户资信评审目前位于签署前，授信决定不纳入本期。账期、历史合作方式等补充管控，由销售提供方案后再列入依据。</a:t>
+            </a:r>
           </a:p>
         </p:txBody>
       </p:sp>
@@ -993,9 +1362,26 @@
           <a:p>
             <a:r>
               <a:rPr lang="zh-CN" altLang="en-US" dirty="0"/>
-              <a:t>本期从创建录入与评审辅助切入。预填单与评审卡的写回都要人工确认。发货排产、补充协议、退换货只作提醒。物料名称与编码规则由双方共同厘定，不承诺全量自动匹配。</a:t>
-            </a:r>
-            <a:endParaRPr lang="zh-CN" altLang="en-US" dirty="0"/>
+              <a:t>本期范围是合同创建录入与评审辅助。系统依据报价单或扫描件生成预填单。字段是销售易合同表单上的填报项。系统抽取这些项的取值，并标注出处，即报价单的行或合同中的语句。未能确定出处，或取值把握不足的字段，提交销售确认。</a:t>
+            </a:r>
+          </a:p>
+          <a:p>
+            <a:r>
+              <a:rPr lang="zh-CN" altLang="en-US" dirty="0"/>
+              <a:t>物料已有对照规则的，写明内部名称。未匹配的提供候选清单，不自动赋码。缺失信息向销售发起补件，不自行补录。销售确认后，预填单才进入后续环节。</a:t>
+            </a:r>
+          </a:p>
+          <a:p>
+            <a:r>
+              <a:rPr lang="zh-CN" altLang="en-US" dirty="0"/>
+              <a:t>评审核对产品、价格、交期、付款比例与收货是否一致。技术、商务、法务对照已发布依据标注。修改建议须引用依据。依据要求记载而合同未记载的，结论为待补。没有依据的事项不列入评审卡。系统不直接放行。</a:t>
+            </a:r>
+          </a:p>
+          <a:p>
+            <a:r>
+              <a:rPr lang="zh-CN" altLang="en-US" dirty="0"/>
+              <a:t>发货排产、补充协议与退换货仅作提醒，不写入单据，不替代签署、盖章、建单与定责。方案是否合格由人判断。名称与编码规则由双方厘定，不承诺全量自动匹配。</a:t>
+            </a:r>
           </a:p>
         </p:txBody>
       </p:sp>
@@ -1041,9 +1427,32 @@
           <a:p>
             <a:r>
               <a:rPr lang="zh-CN" altLang="en-US" dirty="0"/>
-              <a:t>客户材料记载扫描件识别率，不作为本期承诺，不写上页面。低置信度字段提交人工确认，不使用「标黄」等实现用语。缺失信息不自行补录。</a:t>
-            </a:r>
-            <a:endParaRPr lang="zh-CN" altLang="en-US" dirty="0"/>
+              <a:t>录入来源为报价单、Word 或扫描件。来源保留，供核对字段出自哪一份单据。</a:t>
+            </a:r>
+          </a:p>
+          <a:p>
+            <a:r>
+              <a:rPr lang="zh-CN" altLang="en-US" dirty="0"/>
+              <a:t>字段提取的对象包括客户与项目、金额与付款、收货与质保。每一项标注出处。未能确定出处或取值把握不足的字段，提交人工确认。</a:t>
+            </a:r>
+          </a:p>
+          <a:p>
+            <a:r>
+              <a:rPr lang="zh-CN" altLang="en-US" dirty="0"/>
+              <a:t>物料已有对照规则的，写明内部名称。未形成对照的，提供候选清单，不自动赋码。名称与编码规则由双方厘定。</a:t>
+            </a:r>
+          </a:p>
+          <a:p>
+            <a:r>
+              <a:rPr lang="zh-CN" altLang="en-US" dirty="0"/>
+              <a:t>质保年限、验收条件、签收信息等缺失项，向销售发起补件。系统不自行补录。</a:t>
+            </a:r>
+          </a:p>
+          <a:p>
+            <a:r>
+              <a:rPr lang="zh-CN" altLang="en-US" dirty="0"/>
+              <a:t>销售逐项确认预填单，确认人留痕。未确认的字段不进入后续环节。</a:t>
+            </a:r>
           </a:p>
         </p:txBody>
       </p:sp>
@@ -1089,9 +1498,26 @@
           <a:p>
             <a:r>
               <a:rPr lang="zh-CN" altLang="en-US" dirty="0"/>
-              <a:t>结论分三类。依据要求记载而合同未记载，为待补。合同已经写明具体标准号且无法对应，为无法判断。这是对客户原文「未覆盖即写无法判断」的收窄，避免把没有依据的题目写成结论。技术标注不判定方案是否合格。商务标注不判断授权是否超限。法务提示不下达责任结论，也不给出可签或不可签。演示时卡片可以一次点确认。正式流程是三位评审人在同一张卡上同时确认各自段落。技术、商务、法务的标注在基础核对之后同时进行。</a:t>
-            </a:r>
-            <a:endParaRPr lang="zh-CN" altLang="en-US" dirty="0"/>
+              <a:t>基础核对价格、交期、付款比例与收货。技术、商务、法务在基础核对之后同时进行，各自确认本段。</a:t>
+            </a:r>
+          </a:p>
+          <a:p>
+            <a:r>
+              <a:rPr lang="zh-CN" altLang="en-US" dirty="0"/>
+              <a:t>技术标注对照配比、厚度、基层等参数，不判定方案是否合格。商务标注对照付款、赔偿违约、宽限期，建议必须引用已发布依据，不判断授权是否超限。法务提示对照质保年限、验收标准与标准号，不下达责任结论，也不给出可签或不可签。</a:t>
+            </a:r>
+          </a:p>
+          <a:p>
+            <a:r>
+              <a:rPr lang="zh-CN" altLang="en-US" dirty="0"/>
+              <a:t>结论分两类需要分开。依据要求记载而合同未记载的，结论为待补。合同已经写明具体标准号，且无法与已发布依据对应的，结论为无法判断。没有依据条目的事项不列入评审卡。</a:t>
+            </a:r>
+          </a:p>
+          <a:p>
+            <a:r>
+              <a:rPr lang="zh-CN" altLang="en-US" dirty="0"/>
+              <a:t>三份标注到齐后汇编为一张评审卡。三位评审人在同一张卡上同时确认各自段落。</a:t>
+            </a:r>
           </a:p>
         </p:txBody>
       </p:sp>
@@ -1137,9 +1563,20 @@
           <a:p>
             <a:r>
               <a:rPr lang="zh-CN" altLang="en-US" dirty="0"/>
-              <a:t>合同评审要用的技术、商务、法务依据，就是知识库要发布的当前有效规则。无对应条目的事项不列入评审卡。</a:t>
-            </a:r>
-            <a:endParaRPr lang="zh-CN" altLang="en-US" dirty="0"/>
+              <a:t>录入依赖两类依据。一是物料别名与内部名称、编码的对照；二是字段是否按要求记载。字段即合同表单上的填报项。未形成对照规则的物料只提供候选清单，不自动赋码。名称与编码规则由双方厘定，不承诺全量自动匹配。每一项保留出处。</a:t>
+            </a:r>
+          </a:p>
+          <a:p>
+            <a:r>
+              <a:rPr lang="zh-CN" altLang="en-US" dirty="0"/>
+              <a:t>评审依赖结算规则、签收一致性，以及技术、商务、法务已发布条目。无对应条目的事项不列入评审卡。</a:t>
+            </a:r>
+          </a:p>
+          <a:p>
+            <a:r>
+              <a:rPr lang="zh-CN" altLang="en-US" dirty="0"/>
+              <a:t>上述依据由知识库发布，并保持为当前有效的业务规则。合同评审与销售问答使用同一套已发布条目。修订时发布新条，旧条退役并留档。未发布的草稿不参与引用。</a:t>
+            </a:r>
           </a:p>
         </p:txBody>
       </p:sp>
